--- a/GenAI/wk3_LLM_Prompting/2_LLM_PromptOptimization_RAG_FineTuning_FullTraining.pptx
+++ b/GenAI/wk3_LLM_Prompting/2_LLM_PromptOptimization_RAG_FineTuning_FullTraining.pptx
@@ -225,7 +225,7 @@
           <a:p>
             <a:fld id="{7BAEECA8-D063-486F-AE31-5020270C1449}" type="datetimeFigureOut">
               <a:rPr lang="en-US" smtClean="0"/>
-              <a:t>9/24/2026</a:t>
+              <a:t>9/26/2026</a:t>
             </a:fld>
             <a:endParaRPr lang="en-US"/>
           </a:p>
@@ -402,7 +402,7 @@
           <a:p>
             <a:fld id="{CB233BD1-3BA8-448D-9D08-7846095EA517}" type="datetimeFigureOut">
               <a:rPr lang="en-US" smtClean="0"/>
-              <a:t>9/24/2026</a:t>
+              <a:t>9/26/2026</a:t>
             </a:fld>
             <a:endParaRPr lang="en-US"/>
           </a:p>
@@ -816,7 +816,7 @@
           <a:p>
             <a:fld id="{6383FAE1-13DE-4511-8C1B-C8AFB720664C}" type="datetimeFigureOut">
               <a:rPr lang="en-US" smtClean="0"/>
-              <a:t>9/24/2026</a:t>
+              <a:t>9/26/2026</a:t>
             </a:fld>
             <a:endParaRPr lang="en-US"/>
           </a:p>
@@ -1014,7 +1014,7 @@
           <a:p>
             <a:fld id="{6383FAE1-13DE-4511-8C1B-C8AFB720664C}" type="datetimeFigureOut">
               <a:rPr lang="en-US" smtClean="0"/>
-              <a:t>9/24/2026</a:t>
+              <a:t>9/26/2026</a:t>
             </a:fld>
             <a:endParaRPr lang="en-US"/>
           </a:p>
@@ -1222,7 +1222,7 @@
           <a:p>
             <a:fld id="{6383FAE1-13DE-4511-8C1B-C8AFB720664C}" type="datetimeFigureOut">
               <a:rPr lang="en-US" smtClean="0"/>
-              <a:t>9/24/2026</a:t>
+              <a:t>9/26/2026</a:t>
             </a:fld>
             <a:endParaRPr lang="en-US"/>
           </a:p>
@@ -1420,7 +1420,7 @@
           <a:p>
             <a:fld id="{6383FAE1-13DE-4511-8C1B-C8AFB720664C}" type="datetimeFigureOut">
               <a:rPr lang="en-US" smtClean="0"/>
-              <a:t>9/24/2026</a:t>
+              <a:t>9/26/2026</a:t>
             </a:fld>
             <a:endParaRPr lang="en-US"/>
           </a:p>
@@ -1695,7 +1695,7 @@
           <a:p>
             <a:fld id="{6383FAE1-13DE-4511-8C1B-C8AFB720664C}" type="datetimeFigureOut">
               <a:rPr lang="en-US" smtClean="0"/>
-              <a:t>9/24/2026</a:t>
+              <a:t>9/26/2026</a:t>
             </a:fld>
             <a:endParaRPr lang="en-US"/>
           </a:p>
@@ -1960,7 +1960,7 @@
           <a:p>
             <a:fld id="{6383FAE1-13DE-4511-8C1B-C8AFB720664C}" type="datetimeFigureOut">
               <a:rPr lang="en-US" smtClean="0"/>
-              <a:t>9/24/2026</a:t>
+              <a:t>9/26/2026</a:t>
             </a:fld>
             <a:endParaRPr lang="en-US"/>
           </a:p>
@@ -2372,7 +2372,7 @@
           <a:p>
             <a:fld id="{6383FAE1-13DE-4511-8C1B-C8AFB720664C}" type="datetimeFigureOut">
               <a:rPr lang="en-US" smtClean="0"/>
-              <a:t>9/24/2026</a:t>
+              <a:t>9/26/2026</a:t>
             </a:fld>
             <a:endParaRPr lang="en-US"/>
           </a:p>
@@ -2513,7 +2513,7 @@
           <a:p>
             <a:fld id="{6383FAE1-13DE-4511-8C1B-C8AFB720664C}" type="datetimeFigureOut">
               <a:rPr lang="en-US" smtClean="0"/>
-              <a:t>9/24/2026</a:t>
+              <a:t>9/26/2026</a:t>
             </a:fld>
             <a:endParaRPr lang="en-US"/>
           </a:p>
@@ -2626,7 +2626,7 @@
           <a:p>
             <a:fld id="{6383FAE1-13DE-4511-8C1B-C8AFB720664C}" type="datetimeFigureOut">
               <a:rPr lang="en-US" smtClean="0"/>
-              <a:t>9/24/2026</a:t>
+              <a:t>9/26/2026</a:t>
             </a:fld>
             <a:endParaRPr lang="en-US"/>
           </a:p>
@@ -2937,7 +2937,7 @@
           <a:p>
             <a:fld id="{6383FAE1-13DE-4511-8C1B-C8AFB720664C}" type="datetimeFigureOut">
               <a:rPr lang="en-US" smtClean="0"/>
-              <a:t>9/24/2026</a:t>
+              <a:t>9/26/2026</a:t>
             </a:fld>
             <a:endParaRPr lang="en-US"/>
           </a:p>
@@ -3228,7 +3228,7 @@
           <a:p>
             <a:fld id="{6383FAE1-13DE-4511-8C1B-C8AFB720664C}" type="datetimeFigureOut">
               <a:rPr lang="en-US" smtClean="0"/>
-              <a:t>9/24/2026</a:t>
+              <a:t>9/26/2026</a:t>
             </a:fld>
             <a:endParaRPr lang="en-US"/>
           </a:p>
@@ -3472,7 +3472,7 @@
           <a:p>
             <a:fld id="{6383FAE1-13DE-4511-8C1B-C8AFB720664C}" type="datetimeFigureOut">
               <a:rPr lang="en-US" smtClean="0"/>
-              <a:t>9/24/2026</a:t>
+              <a:t>9/26/2026</a:t>
             </a:fld>
             <a:endParaRPr lang="en-US"/>
           </a:p>
@@ -6066,7 +6066,7 @@
         </p:nvSpPr>
         <p:spPr>
           <a:xfrm>
-            <a:off x="926592" y="1040380"/>
+            <a:off x="268224" y="564892"/>
             <a:ext cx="11128248" cy="1077218"/>
           </a:xfrm>
           <a:prstGeom prst="rect">
